--- a/docs/Presentation_Slides.pptx
+++ b/docs/Presentation_Slides.pptx
@@ -12,6 +12,11 @@
     <p:sldId id="260" r:id="rId11"/>
     <p:sldId id="261" r:id="rId12"/>
     <p:sldId id="262" r:id="rId13"/>
+    <p:sldId id="263" r:id="rId14"/>
+    <p:sldId id="264" r:id="rId15"/>
+    <p:sldId id="265" r:id="rId16"/>
+    <p:sldId id="266" r:id="rId17"/>
+    <p:sldId id="267" r:id="rId18"/>
   </p:sldIdLst>
   <p:sldSz cx="9144000" cy="6858000" type="screen4x3"/>
   <p:notesSz cx="6858000" cy="9144000"/>
@@ -3154,6 +3159,222 @@
 </p:sld>
 </file>
 
+<file path=ppt/slides/slide10.xml><?xml version="1.0" encoding="utf-8"?>
+<p:sld xmlns:a="http://schemas.openxmlformats.org/drawingml/2006/main" xmlns:p="http://schemas.openxmlformats.org/presentationml/2006/main" xmlns:r="http://schemas.openxmlformats.org/officeDocument/2006/relationships">
+  <p:cSld>
+    <p:spTree>
+      <p:nvGrpSpPr>
+        <p:cNvPr id="1" name=""/>
+        <p:cNvGrpSpPr/>
+        <p:nvPr/>
+      </p:nvGrpSpPr>
+      <p:grpSpPr/>
+      <p:sp>
+        <p:nvSpPr>
+          <p:cNvPr id="2" name="Title 1"/>
+          <p:cNvSpPr>
+            <a:spLocks noGrp="1"/>
+          </p:cNvSpPr>
+          <p:nvPr>
+            <p:ph type="title"/>
+          </p:nvPr>
+        </p:nvSpPr>
+        <p:spPr/>
+        <p:txBody>
+          <a:bodyPr/>
+          <a:lstStyle/>
+          <a:p>
+            <a:r>
+              <a:t>Challenges &amp; Limitations</a:t>
+            </a:r>
+          </a:p>
+        </p:txBody>
+      </p:sp>
+      <p:sp>
+        <p:nvSpPr>
+          <p:cNvPr id="3" name="Content Placeholder 2"/>
+          <p:cNvSpPr>
+            <a:spLocks noGrp="1"/>
+          </p:cNvSpPr>
+          <p:nvPr>
+            <p:ph idx="1"/>
+          </p:nvPr>
+        </p:nvSpPr>
+        <p:spPr/>
+        <p:txBody>
+          <a:bodyPr/>
+          <a:lstStyle/>
+          <a:p/>
+          <a:p>
+            <a:pPr/>
+            <a:r>
+              <a:t>Assumptions of standard SIR (constant population, homogenous mixing).</a:t>
+            </a:r>
+          </a:p>
+          <a:p>
+            <a:pPr/>
+            <a:r>
+              <a:t>Limitations of synthetic datasets compared to real-world noisy data.</a:t>
+            </a:r>
+          </a:p>
+          <a:p>
+            <a:pPr/>
+            <a:r>
+              <a:t>Time-series forecasting limits using simple lag features.</a:t>
+            </a:r>
+          </a:p>
+        </p:txBody>
+      </p:sp>
+    </p:spTree>
+  </p:cSld>
+  <p:clrMapOvr>
+    <a:masterClrMapping/>
+  </p:clrMapOvr>
+</p:sld>
+</file>
+
+<file path=ppt/slides/slide11.xml><?xml version="1.0" encoding="utf-8"?>
+<p:sld xmlns:a="http://schemas.openxmlformats.org/drawingml/2006/main" xmlns:p="http://schemas.openxmlformats.org/presentationml/2006/main" xmlns:r="http://schemas.openxmlformats.org/officeDocument/2006/relationships">
+  <p:cSld>
+    <p:spTree>
+      <p:nvGrpSpPr>
+        <p:cNvPr id="1" name=""/>
+        <p:cNvGrpSpPr/>
+        <p:nvPr/>
+      </p:nvGrpSpPr>
+      <p:grpSpPr/>
+      <p:sp>
+        <p:nvSpPr>
+          <p:cNvPr id="2" name="Title 1"/>
+          <p:cNvSpPr>
+            <a:spLocks noGrp="1"/>
+          </p:cNvSpPr>
+          <p:nvPr>
+            <p:ph type="title"/>
+          </p:nvPr>
+        </p:nvSpPr>
+        <p:spPr/>
+        <p:txBody>
+          <a:bodyPr/>
+          <a:lstStyle/>
+          <a:p>
+            <a:r>
+              <a:t>Conclusion &amp; Future Enhancements</a:t>
+            </a:r>
+          </a:p>
+        </p:txBody>
+      </p:sp>
+      <p:sp>
+        <p:nvSpPr>
+          <p:cNvPr id="3" name="Content Placeholder 2"/>
+          <p:cNvSpPr>
+            <a:spLocks noGrp="1"/>
+          </p:cNvSpPr>
+          <p:nvPr>
+            <p:ph idx="1"/>
+          </p:nvPr>
+        </p:nvSpPr>
+        <p:spPr/>
+        <p:txBody>
+          <a:bodyPr/>
+          <a:lstStyle/>
+          <a:p/>
+          <a:p>
+            <a:pPr/>
+            <a:r>
+              <a:t>Successfully created a full-stack data science &amp; simulation application.</a:t>
+            </a:r>
+          </a:p>
+          <a:p>
+            <a:pPr/>
+            <a:r>
+              <a:t>Future work: Expanding to SEIR models (adding 'Exposed' compartment).</a:t>
+            </a:r>
+          </a:p>
+          <a:p>
+            <a:pPr/>
+            <a:r>
+              <a:t>Adding deep learning (LSTMs) for more robust predictions.</a:t>
+            </a:r>
+          </a:p>
+        </p:txBody>
+      </p:sp>
+    </p:spTree>
+  </p:cSld>
+  <p:clrMapOvr>
+    <a:masterClrMapping/>
+  </p:clrMapOvr>
+</p:sld>
+</file>
+
+<file path=ppt/slides/slide12.xml><?xml version="1.0" encoding="utf-8"?>
+<p:sld xmlns:a="http://schemas.openxmlformats.org/drawingml/2006/main" xmlns:p="http://schemas.openxmlformats.org/presentationml/2006/main" xmlns:r="http://schemas.openxmlformats.org/officeDocument/2006/relationships">
+  <p:cSld>
+    <p:spTree>
+      <p:nvGrpSpPr>
+        <p:cNvPr id="1" name=""/>
+        <p:cNvGrpSpPr/>
+        <p:nvPr/>
+      </p:nvGrpSpPr>
+      <p:grpSpPr/>
+      <p:sp>
+        <p:nvSpPr>
+          <p:cNvPr id="2" name="Title 1"/>
+          <p:cNvSpPr>
+            <a:spLocks noGrp="1"/>
+          </p:cNvSpPr>
+          <p:nvPr>
+            <p:ph type="title"/>
+          </p:nvPr>
+        </p:nvSpPr>
+        <p:spPr/>
+        <p:txBody>
+          <a:bodyPr/>
+          <a:lstStyle/>
+          <a:p>
+            <a:r>
+              <a:t>Q&amp;A</a:t>
+            </a:r>
+          </a:p>
+        </p:txBody>
+      </p:sp>
+      <p:sp>
+        <p:nvSpPr>
+          <p:cNvPr id="3" name="Content Placeholder 2"/>
+          <p:cNvSpPr>
+            <a:spLocks noGrp="1"/>
+          </p:cNvSpPr>
+          <p:nvPr>
+            <p:ph idx="1"/>
+          </p:nvPr>
+        </p:nvSpPr>
+        <p:spPr/>
+        <p:txBody>
+          <a:bodyPr/>
+          <a:lstStyle/>
+          <a:p/>
+          <a:p>
+            <a:pPr/>
+            <a:r>
+              <a:t>Thank you for your attention!</a:t>
+            </a:r>
+          </a:p>
+          <a:p>
+            <a:pPr/>
+            <a:r>
+              <a:t>Are there any questions?</a:t>
+            </a:r>
+          </a:p>
+        </p:txBody>
+      </p:sp>
+    </p:spTree>
+  </p:cSld>
+  <p:clrMapOvr>
+    <a:masterClrMapping/>
+  </p:clrMapOvr>
+</p:sld>
+</file>
+
 <file path=ppt/slides/slide2.xml><?xml version="1.0" encoding="utf-8"?>
 <p:sld xmlns:a="http://schemas.openxmlformats.org/drawingml/2006/main" xmlns:p="http://schemas.openxmlformats.org/presentationml/2006/main" xmlns:r="http://schemas.openxmlformats.org/officeDocument/2006/relationships">
   <p:cSld>
@@ -3180,7 +3401,7 @@
           <a:lstStyle/>
           <a:p>
             <a:r>
-              <a:t>Project Overview</a:t>
+              <a:t>Introduction &amp; Problem Statement</a:t>
             </a:r>
           </a:p>
         </p:txBody>
@@ -3203,13 +3424,19 @@
           <a:p>
             <a:pPr/>
             <a:r>
-              <a:t>Problem statement: Understanding and predicting disease spread.</a:t>
+              <a:t>Understanding the rapid spread of infectious diseases.</a:t>
             </a:r>
           </a:p>
           <a:p>
             <a:pPr/>
             <a:r>
-              <a:t>Deliverables achieved: Simulation, ML Models, Dashboard.</a:t>
+              <a:t>The need for computational models to predict and mitigate outbreaks.</a:t>
+            </a:r>
+          </a:p>
+          <a:p>
+            <a:pPr/>
+            <a:r>
+              <a:t>How simulation helps policymakers in decision making.</a:t>
             </a:r>
           </a:p>
         </p:txBody>
@@ -3248,7 +3475,7 @@
           <a:lstStyle/>
           <a:p>
             <a:r>
-              <a:t>Dataset Generation &amp; Analysis</a:t>
+              <a:t>Project Objectives</a:t>
             </a:r>
           </a:p>
         </p:txBody>
@@ -3271,19 +3498,19 @@
           <a:p>
             <a:pPr/>
             <a:r>
-              <a:t>Dataset generated using SIR model + noise.</a:t>
+              <a:t>Fulfill requirements for CLO.3 and CLO.4.</a:t>
             </a:r>
           </a:p>
           <a:p>
             <a:pPr/>
             <a:r>
-              <a:t>Includes Stringency Index and Testing Rates.</a:t>
+              <a:t>Build a mathematical simulation of disease dynamics.</a:t>
             </a:r>
           </a:p>
           <a:p>
             <a:pPr/>
             <a:r>
-              <a:t>Key insights extracted via Exploratory Data Analysis.</a:t>
+              <a:t>Integrate Machine Learning to predict future trends based on historical data.</a:t>
             </a:r>
           </a:p>
         </p:txBody>
@@ -3322,7 +3549,7 @@
           <a:lstStyle/>
           <a:p>
             <a:r>
-              <a:t>Simulation Methodology</a:t>
+              <a:t>Theoretical Background: The SIR Model</a:t>
             </a:r>
           </a:p>
         </p:txBody>
@@ -3345,19 +3572,25 @@
           <a:p>
             <a:pPr/>
             <a:r>
-              <a:t>Utilizes the SIR (Susceptible-Infectious-Recovered) Model.</a:t>
+              <a:t>Susceptible (S): Population at risk of contracting the disease.</a:t>
             </a:r>
           </a:p>
           <a:p>
             <a:pPr/>
             <a:r>
-              <a:t>Demonstrates how diseases spread over time.</a:t>
+              <a:t>Infectious (I): Population currently infected and contagious.</a:t>
             </a:r>
           </a:p>
           <a:p>
             <a:pPr/>
             <a:r>
-              <a:t>Interactive parameters: Transmission rate and recovery rate.</a:t>
+              <a:t>Recovered (R): Population that has recovered and gained immunity.</a:t>
+            </a:r>
+          </a:p>
+          <a:p>
+            <a:pPr/>
+            <a:r>
+              <a:t>Governed by transmission rate (beta) and recovery rate (gamma).</a:t>
             </a:r>
           </a:p>
         </p:txBody>
@@ -3396,7 +3629,7 @@
           <a:lstStyle/>
           <a:p>
             <a:r>
-              <a:t>Machine Learning Predictions</a:t>
+              <a:t>Dataset Generation &amp; EDA</a:t>
             </a:r>
           </a:p>
         </p:txBody>
@@ -3419,31 +3652,19 @@
           <a:p>
             <a:pPr/>
             <a:r>
-              <a:t>Three models built to predict new cases.</a:t>
+              <a:t>Generating synthetic data using an SIR model with Gaussian noise.</a:t>
             </a:r>
           </a:p>
           <a:p>
             <a:pPr/>
             <a:r>
-              <a:t>1. Linear Regression (Baseline)</a:t>
+              <a:t>Features included: Stringency Index and Testing Rates.</a:t>
             </a:r>
           </a:p>
           <a:p>
             <a:pPr/>
             <a:r>
-              <a:t>2. Random Forest</a:t>
-            </a:r>
-          </a:p>
-          <a:p>
-            <a:pPr/>
-            <a:r>
-              <a:t>3. Gradient Boosting</a:t>
-            </a:r>
-          </a:p>
-          <a:p>
-            <a:pPr/>
-            <a:r>
-              <a:t>Predicts based on 7-day history and external factors.</a:t>
+              <a:t>Exploratory Data Analysis: Correlation matrices and time-series plotting.</a:t>
             </a:r>
           </a:p>
         </p:txBody>
@@ -3482,7 +3703,7 @@
           <a:lstStyle/>
           <a:p>
             <a:r>
-              <a:t>Interactive Demo</a:t>
+              <a:t>Machine Learning Architecture</a:t>
             </a:r>
           </a:p>
         </p:txBody>
@@ -3505,19 +3726,25 @@
           <a:p>
             <a:pPr/>
             <a:r>
-              <a:t>Streamlit Dashboard provides a live demonstration.</a:t>
+              <a:t>Time-series forecasting using 7-day lag features.</a:t>
             </a:r>
           </a:p>
           <a:p>
             <a:pPr/>
             <a:r>
-              <a:t>Allows adjusting parameters and seeing real-time updates.</a:t>
+              <a:t>Model 1: Linear Regression (Baseline model).</a:t>
             </a:r>
           </a:p>
           <a:p>
             <a:pPr/>
             <a:r>
-              <a:t>Compares live model predictions.</a:t>
+              <a:t>Model 2: Random Forest Regressor (Handles non-linear relationships).</a:t>
+            </a:r>
+          </a:p>
+          <a:p>
+            <a:pPr/>
+            <a:r>
+              <a:t>Model 3: Gradient Boosting Regressor (Ensemble learning for high accuracy).</a:t>
             </a:r>
           </a:p>
         </p:txBody>
@@ -3556,7 +3783,7 @@
           <a:lstStyle/>
           <a:p>
             <a:r>
-              <a:t>Conclusion</a:t>
+              <a:t>Model Evaluation &amp; Comparison</a:t>
             </a:r>
           </a:p>
         </p:txBody>
@@ -3579,19 +3806,167 @@
           <a:p>
             <a:pPr/>
             <a:r>
-              <a:t>Successfully integrated simulation and ML into a dashboard.</a:t>
+              <a:t>Evaluation metrics: Mean Squared Error (MSE) and R-squared (R2).</a:t>
             </a:r>
           </a:p>
           <a:p>
             <a:pPr/>
             <a:r>
-              <a:t>Fulfills all CLO.3 and CLO.4 requirements.</a:t>
+              <a:t>Random Forest generally performs best on non-linear epidemic curves.</a:t>
             </a:r>
           </a:p>
           <a:p>
             <a:pPr/>
             <a:r>
-              <a:t>Q&amp;A</a:t>
+              <a:t>Discussion on overfitting vs. generalization.</a:t>
+            </a:r>
+          </a:p>
+        </p:txBody>
+      </p:sp>
+    </p:spTree>
+  </p:cSld>
+  <p:clrMapOvr>
+    <a:masterClrMapping/>
+  </p:clrMapOvr>
+</p:sld>
+</file>
+
+<file path=ppt/slides/slide8.xml><?xml version="1.0" encoding="utf-8"?>
+<p:sld xmlns:a="http://schemas.openxmlformats.org/drawingml/2006/main" xmlns:p="http://schemas.openxmlformats.org/presentationml/2006/main" xmlns:r="http://schemas.openxmlformats.org/officeDocument/2006/relationships">
+  <p:cSld>
+    <p:spTree>
+      <p:nvGrpSpPr>
+        <p:cNvPr id="1" name=""/>
+        <p:cNvGrpSpPr/>
+        <p:nvPr/>
+      </p:nvGrpSpPr>
+      <p:grpSpPr/>
+      <p:sp>
+        <p:nvSpPr>
+          <p:cNvPr id="2" name="Title 1"/>
+          <p:cNvSpPr>
+            <a:spLocks noGrp="1"/>
+          </p:cNvSpPr>
+          <p:nvPr>
+            <p:ph type="title"/>
+          </p:nvPr>
+        </p:nvSpPr>
+        <p:spPr/>
+        <p:txBody>
+          <a:bodyPr/>
+          <a:lstStyle/>
+          <a:p>
+            <a:r>
+              <a:t>Streamlit Dashboard Architecture</a:t>
+            </a:r>
+          </a:p>
+        </p:txBody>
+      </p:sp>
+      <p:sp>
+        <p:nvSpPr>
+          <p:cNvPr id="3" name="Content Placeholder 2"/>
+          <p:cNvSpPr>
+            <a:spLocks noGrp="1"/>
+          </p:cNvSpPr>
+          <p:nvPr>
+            <p:ph idx="1"/>
+          </p:nvPr>
+        </p:nvSpPr>
+        <p:spPr/>
+        <p:txBody>
+          <a:bodyPr/>
+          <a:lstStyle/>
+          <a:p/>
+          <a:p>
+            <a:pPr/>
+            <a:r>
+              <a:t>Component 1: EDA Viewer (Dataframes, Matplotlib plots).</a:t>
+            </a:r>
+          </a:p>
+          <a:p>
+            <a:pPr/>
+            <a:r>
+              <a:t>Component 2: Interactive Simulator (Adjustable transmission/recovery).</a:t>
+            </a:r>
+          </a:p>
+          <a:p>
+            <a:pPr/>
+            <a:r>
+              <a:t>Component 3: ML Predictor Interface for future cases.</a:t>
+            </a:r>
+          </a:p>
+        </p:txBody>
+      </p:sp>
+    </p:spTree>
+  </p:cSld>
+  <p:clrMapOvr>
+    <a:masterClrMapping/>
+  </p:clrMapOvr>
+</p:sld>
+</file>
+
+<file path=ppt/slides/slide9.xml><?xml version="1.0" encoding="utf-8"?>
+<p:sld xmlns:a="http://schemas.openxmlformats.org/drawingml/2006/main" xmlns:p="http://schemas.openxmlformats.org/presentationml/2006/main" xmlns:r="http://schemas.openxmlformats.org/officeDocument/2006/relationships">
+  <p:cSld>
+    <p:spTree>
+      <p:nvGrpSpPr>
+        <p:cNvPr id="1" name=""/>
+        <p:cNvGrpSpPr/>
+        <p:nvPr/>
+      </p:nvGrpSpPr>
+      <p:grpSpPr/>
+      <p:sp>
+        <p:nvSpPr>
+          <p:cNvPr id="2" name="Title 1"/>
+          <p:cNvSpPr>
+            <a:spLocks noGrp="1"/>
+          </p:cNvSpPr>
+          <p:nvPr>
+            <p:ph type="title"/>
+          </p:nvPr>
+        </p:nvSpPr>
+        <p:spPr/>
+        <p:txBody>
+          <a:bodyPr/>
+          <a:lstStyle/>
+          <a:p>
+            <a:r>
+              <a:t>Interactive Simulation &amp; Results</a:t>
+            </a:r>
+          </a:p>
+        </p:txBody>
+      </p:sp>
+      <p:sp>
+        <p:nvSpPr>
+          <p:cNvPr id="3" name="Content Placeholder 2"/>
+          <p:cNvSpPr>
+            <a:spLocks noGrp="1"/>
+          </p:cNvSpPr>
+          <p:nvPr>
+            <p:ph idx="1"/>
+          </p:nvPr>
+        </p:nvSpPr>
+        <p:spPr/>
+        <p:txBody>
+          <a:bodyPr/>
+          <a:lstStyle/>
+          <a:p/>
+          <a:p>
+            <a:pPr/>
+            <a:r>
+              <a:t>Demonstration of the interactive simulation.</a:t>
+            </a:r>
+          </a:p>
+          <a:p>
+            <a:pPr/>
+            <a:r>
+              <a:t>Visualizing 'flattening the curve' by lowering transmission rates.</a:t>
+            </a:r>
+          </a:p>
+          <a:p>
+            <a:pPr/>
+            <a:r>
+              <a:t>Real-time updates dynamically driven by Streamlit.</a:t>
             </a:r>
           </a:p>
         </p:txBody>
